--- a/CrowdHeal.pptx
+++ b/CrowdHeal.pptx
@@ -2274,7 +2274,29 @@
                 <a:ea typeface="Calibri" pitchFamily="34" charset="-122"/>
                 <a:cs typeface="Calibri" pitchFamily="34" charset="-120"/>
               </a:rPr>
-              <a:t>Account and session data uses sessionStorage.</a:t>
+              <a:t>Account and session data uses </a:t>
+            </a:r>
+            <a:r>
+              <a:rPr lang="en-US" sz="1250" dirty="0" err="1">
+                <a:solidFill>
+                  <a:srgbClr val="1E2A44"/>
+                </a:solidFill>
+                <a:latin typeface="Calibri" pitchFamily="34" charset="0"/>
+                <a:ea typeface="Calibri" pitchFamily="34" charset="-122"/>
+                <a:cs typeface="Calibri" pitchFamily="34" charset="-120"/>
+              </a:rPr>
+              <a:t>localStorage</a:t>
+            </a:r>
+            <a:r>
+              <a:rPr lang="en-US" sz="1250" dirty="0">
+                <a:solidFill>
+                  <a:srgbClr val="1E2A44"/>
+                </a:solidFill>
+                <a:latin typeface="Calibri" pitchFamily="34" charset="0"/>
+                <a:ea typeface="Calibri" pitchFamily="34" charset="-122"/>
+                <a:cs typeface="Calibri" pitchFamily="34" charset="-120"/>
+              </a:rPr>
+              <a:t>.</a:t>
             </a:r>
             <a:endParaRPr lang="en-US" sz="1250" dirty="0"/>
           </a:p>
@@ -3061,6 +3083,13 @@
           </a:solidFill>
           <a:ln/>
         </p:spPr>
+        <p:txBody>
+          <a:bodyPr/>
+          <a:lstStyle/>
+          <a:p>
+            <a:endParaRPr lang="en-IN" dirty="0"/>
+          </a:p>
+        </p:txBody>
       </p:sp>
       <p:sp>
         <p:nvSpPr>
@@ -3095,7 +3124,7 @@
                 <a:ea typeface="Calibri" pitchFamily="34" charset="-122"/>
                 <a:cs typeface="Calibri" pitchFamily="34" charset="-120"/>
               </a:rPr>
-              <a:t>THE IDEA</a:t>
+              <a:t>THE SOLUTION</a:t>
             </a:r>
             <a:endParaRPr lang="en-US" sz="1150" dirty="0"/>
           </a:p>
